--- a/Lectures/01-ClassOverview.pptx
+++ b/Lectures/01-ClassOverview.pptx
@@ -285,7 +285,7 @@
 </file>
 
 <file path=ppt/diagrams/colors1.xml><?xml version="1.0" encoding="utf-8"?>
-<dgm:colorsDef xmlns:dgm="http://schemas.openxmlformats.org/drawingml/2006/diagram" xmlns:a="http://schemas.openxmlformats.org/drawingml/2006/main" uniqueId="urn:microsoft.com/office/officeart/2005/8/colors/colorful1">
+<dgm:colorsDef xmlns:dgm="http://schemas.openxmlformats.org/drawingml/2006/diagram" xmlns:a="http://schemas.openxmlformats.org/drawingml/2006/main" uniqueId="urn:microsoft.com/office/officeart/2005/8/colors/colorful1#1">
   <dgm:title val=""/>
   <dgm:desc val=""/>
   <dgm:catLst>
@@ -1207,7 +1207,7 @@
 <dgm:dataModel xmlns:dgm="http://schemas.openxmlformats.org/drawingml/2006/diagram" xmlns:a="http://schemas.openxmlformats.org/drawingml/2006/main">
   <dgm:ptLst>
     <dgm:pt modelId="{E9FB0F4E-6967-3B44-A32F-E8B1C7AE98D5}" type="doc">
-      <dgm:prSet loTypeId="urn:microsoft.com/office/officeart/2005/8/layout/process5" loCatId="" qsTypeId="urn:microsoft.com/office/officeart/2005/8/quickstyle/simple1" qsCatId="simple" csTypeId="urn:microsoft.com/office/officeart/2005/8/colors/colorful1" csCatId="colorful" phldr="1"/>
+      <dgm:prSet loTypeId="urn:microsoft.com/office/officeart/2005/8/layout/process5" loCatId="" qsTypeId="urn:microsoft.com/office/officeart/2005/8/quickstyle/simple1#1" qsCatId="simple" csTypeId="urn:microsoft.com/office/officeart/2005/8/colors/colorful1#1" csCatId="colorful" phldr="1"/>
       <dgm:spPr/>
       <dgm:t>
         <a:bodyPr/>
@@ -4256,7 +4256,7 @@
 </file>
 
 <file path=ppt/diagrams/quickStyle1.xml><?xml version="1.0" encoding="utf-8"?>
-<dgm:styleDef xmlns:dgm="http://schemas.openxmlformats.org/drawingml/2006/diagram" xmlns:a="http://schemas.openxmlformats.org/drawingml/2006/main" uniqueId="urn:microsoft.com/office/officeart/2005/8/quickstyle/simple1">
+<dgm:styleDef xmlns:dgm="http://schemas.openxmlformats.org/drawingml/2006/diagram" xmlns:a="http://schemas.openxmlformats.org/drawingml/2006/main" uniqueId="urn:microsoft.com/office/officeart/2005/8/quickstyle/simple1#1">
   <dgm:title val=""/>
   <dgm:desc val=""/>
   <dgm:catLst>
@@ -12209,8 +12209,15 @@
               <a:buNone/>
             </a:pPr>
             <a:r>
+              <a:rPr lang="en" sz="4800" dirty="0"/>
+              <a:t>Machine Learning in Practice</a:t>
+            </a:r>
+            <a:br>
               <a:rPr lang="en" sz="4400" dirty="0"/>
-              <a:t>Machine Learning for Public Policy Lab</a:t>
+            </a:br>
+            <a:r>
+              <a:rPr lang="en" sz="4000" dirty="0"/>
+              <a:t>(for Social Good and Public Policy)</a:t>
             </a:r>
             <a:endParaRPr sz="3200" dirty="0"/>
           </a:p>
@@ -12808,12 +12815,20 @@
               <a:buSzPts val="1600"/>
             </a:pPr>
             <a:r>
+              <a:rPr lang="en-US" sz="1600" dirty="0">
+                <a:solidFill>
+                  <a:schemeClr val="dk1"/>
+                </a:solidFill>
+              </a:rPr>
+              <a:t>L</a:t>
+            </a:r>
+            <a:r>
               <a:rPr lang="en" sz="1600" dirty="0">
                 <a:solidFill>
                   <a:schemeClr val="dk1"/>
                 </a:solidFill>
               </a:rPr>
-              <a:t>Wednesday tech and review sessions</a:t>
+              <a:t>ab/tech and review sessions</a:t>
             </a:r>
             <a:endParaRPr lang="en" sz="1600" b="1" dirty="0">
               <a:solidFill>
@@ -14211,18 +14226,26 @@
             </a:pPr>
             <a:r>
               <a:rPr lang="en" dirty="0"/>
-              <a:t>Tech setup (tomorrow) </a:t>
+              <a:t>Tech setup (</a:t>
+            </a:r>
+            <a:r>
+              <a:rPr lang="en" dirty="0" err="1"/>
+              <a:t>friday</a:t>
+            </a:r>
+            <a:r>
+              <a:rPr lang="en" dirty="0"/>
+              <a:t>) </a:t>
             </a:r>
           </a:p>
           <a:p>
             <a:pPr lvl="1"/>
             <a:r>
               <a:rPr lang="en-US" dirty="0"/>
-              <a:t>Make sure to fill out the survey by this afternoo</a:t>
+              <a:t>Make sure to fill out the survey by tomorrow </a:t>
             </a:r>
             <a:r>
               <a:rPr lang="en-US" sz="1000" dirty="0"/>
-              <a:t>n - </a:t>
+              <a:t>- </a:t>
             </a:r>
             <a:r>
               <a:rPr lang="en-US" sz="1200" dirty="0"/>
@@ -14508,7 +14531,7 @@
             </a:r>
             <a:r>
               <a:rPr lang="en-US" sz="1600" dirty="0"/>
-              <a:t>(and get hands-on experience doing most of it)</a:t>
+              <a:t>(and get hands-on experience doing a lot of it)</a:t>
             </a:r>
           </a:p>
           <a:p>
@@ -14768,7 +14791,7 @@
             </a:pPr>
             <a:r>
               <a:rPr lang="en" dirty="0"/>
-              <a:t>Experience with command line (bash), git(hub), working on remote servers</a:t>
+              <a:t>Ideally: Experience with command line (bash), git(hub), working on remote servers</a:t>
             </a:r>
           </a:p>
           <a:p>

--- a/Lectures/01-ClassOverview.pptx
+++ b/Lectures/01-ClassOverview.pptx
@@ -5,7 +5,7 @@
     <p:sldMasterId id="2147483659" r:id="rId1"/>
   </p:sldMasterIdLst>
   <p:notesMasterIdLst>
-    <p:notesMasterId r:id="rId18"/>
+    <p:notesMasterId r:id="rId19"/>
   </p:notesMasterIdLst>
   <p:sldIdLst>
     <p:sldId id="256" r:id="rId2"/>
@@ -16,24 +16,25 @@
     <p:sldId id="296" r:id="rId7"/>
     <p:sldId id="298" r:id="rId8"/>
     <p:sldId id="295" r:id="rId9"/>
-    <p:sldId id="264" r:id="rId10"/>
-    <p:sldId id="266" r:id="rId11"/>
-    <p:sldId id="267" r:id="rId12"/>
-    <p:sldId id="270" r:id="rId13"/>
-    <p:sldId id="271" r:id="rId14"/>
-    <p:sldId id="269" r:id="rId15"/>
-    <p:sldId id="272" r:id="rId16"/>
-    <p:sldId id="273" r:id="rId17"/>
+    <p:sldId id="299" r:id="rId10"/>
+    <p:sldId id="264" r:id="rId11"/>
+    <p:sldId id="266" r:id="rId12"/>
+    <p:sldId id="267" r:id="rId13"/>
+    <p:sldId id="270" r:id="rId14"/>
+    <p:sldId id="271" r:id="rId15"/>
+    <p:sldId id="269" r:id="rId16"/>
+    <p:sldId id="272" r:id="rId17"/>
+    <p:sldId id="273" r:id="rId18"/>
   </p:sldIdLst>
   <p:sldSz cx="9144000" cy="5143500" type="screen16x9"/>
   <p:notesSz cx="6858000" cy="9144000"/>
   <p:embeddedFontLst>
     <p:embeddedFont>
       <p:font typeface="Lato" panose="020F0502020204030203" pitchFamily="34" charset="0"/>
-      <p:regular r:id="rId19"/>
-      <p:bold r:id="rId20"/>
-      <p:italic r:id="rId21"/>
-      <p:boldItalic r:id="rId22"/>
+      <p:regular r:id="rId20"/>
+      <p:bold r:id="rId21"/>
+      <p:italic r:id="rId22"/>
+      <p:boldItalic r:id="rId23"/>
     </p:embeddedFont>
   </p:embeddedFontLst>
   <p:defaultTextStyle>
@@ -12306,6 +12307,75 @@
   <p:cSld>
     <p:spTree>
       <p:nvGrpSpPr>
+        <p:cNvPr id="1" name="Shape 124"/>
+        <p:cNvGrpSpPr/>
+        <p:nvPr/>
+      </p:nvGrpSpPr>
+      <p:grpSpPr>
+        <a:xfrm>
+          <a:off x="0" y="0"/>
+          <a:ext cx="0" cy="0"/>
+          <a:chOff x="0" y="0"/>
+          <a:chExt cx="0" cy="0"/>
+        </a:xfrm>
+      </p:grpSpPr>
+      <p:sp>
+        <p:nvSpPr>
+          <p:cNvPr id="125" name="Google Shape;125;p21"/>
+          <p:cNvSpPr txBox="1">
+            <a:spLocks noGrp="1"/>
+          </p:cNvSpPr>
+          <p:nvPr>
+            <p:ph type="title"/>
+          </p:nvPr>
+        </p:nvSpPr>
+        <p:spPr>
+          <a:xfrm>
+            <a:off x="311700" y="445025"/>
+            <a:ext cx="8520600" cy="572700"/>
+          </a:xfrm>
+          <a:prstGeom prst="rect">
+            <a:avLst/>
+          </a:prstGeom>
+        </p:spPr>
+        <p:txBody>
+          <a:bodyPr spcFirstLastPara="1" wrap="square" lIns="91425" tIns="91425" rIns="91425" bIns="91425" anchor="t" anchorCtr="0">
+            <a:noAutofit/>
+          </a:bodyPr>
+          <a:lstStyle/>
+          <a:p>
+            <a:pPr marL="0" lvl="0" indent="0" algn="l" rtl="0">
+              <a:spcBef>
+                <a:spcPts val="0"/>
+              </a:spcBef>
+              <a:spcAft>
+                <a:spcPts val="0"/>
+              </a:spcAft>
+              <a:buNone/>
+            </a:pPr>
+            <a:r>
+              <a:rPr lang="en-US" dirty="0">
+                <a:hlinkClick r:id="rId3"/>
+              </a:rPr>
+              <a:t>Class Schedule</a:t>
+            </a:r>
+            <a:endParaRPr dirty="0"/>
+          </a:p>
+        </p:txBody>
+      </p:sp>
+    </p:spTree>
+  </p:cSld>
+  <p:clrMapOvr>
+    <a:masterClrMapping/>
+  </p:clrMapOvr>
+</p:sld>
+</file>
+
+<file path=ppt/slides/slide11.xml><?xml version="1.0" encoding="utf-8"?>
+<p:sld xmlns:a="http://schemas.openxmlformats.org/drawingml/2006/main" xmlns:r="http://schemas.openxmlformats.org/officeDocument/2006/relationships" xmlns:p="http://schemas.openxmlformats.org/presentationml/2006/main">
+  <p:cSld>
+    <p:spTree>
+      <p:nvGrpSpPr>
         <p:cNvPr id="1" name="Shape 138"/>
         <p:cNvGrpSpPr/>
         <p:nvPr/>
@@ -12597,7 +12667,7 @@
 </p:sld>
 </file>
 
-<file path=ppt/slides/slide11.xml><?xml version="1.0" encoding="utf-8"?>
+<file path=ppt/slides/slide12.xml><?xml version="1.0" encoding="utf-8"?>
 <p:sld xmlns:a="http://schemas.openxmlformats.org/drawingml/2006/main" xmlns:r="http://schemas.openxmlformats.org/officeDocument/2006/relationships" xmlns:p="http://schemas.openxmlformats.org/presentationml/2006/main">
   <p:cSld>
     <p:spTree>
@@ -12920,7 +12990,7 @@
 </p:sld>
 </file>
 
-<file path=ppt/slides/slide12.xml><?xml version="1.0" encoding="utf-8"?>
+<file path=ppt/slides/slide13.xml><?xml version="1.0" encoding="utf-8"?>
 <p:sld xmlns:a="http://schemas.openxmlformats.org/drawingml/2006/main" xmlns:r="http://schemas.openxmlformats.org/officeDocument/2006/relationships" xmlns:p="http://schemas.openxmlformats.org/presentationml/2006/main">
   <p:cSld>
     <p:spTree>
@@ -13250,7 +13320,7 @@
 </p:sld>
 </file>
 
-<file path=ppt/slides/slide13.xml><?xml version="1.0" encoding="utf-8"?>
+<file path=ppt/slides/slide14.xml><?xml version="1.0" encoding="utf-8"?>
 <p:sld xmlns:a="http://schemas.openxmlformats.org/drawingml/2006/main" xmlns:r="http://schemas.openxmlformats.org/officeDocument/2006/relationships" xmlns:p="http://schemas.openxmlformats.org/presentationml/2006/main">
   <p:cSld>
     <p:spTree>
@@ -13512,7 +13582,7 @@
                   <a:srgbClr val="FF0000"/>
                 </a:solidFill>
               </a:rPr>
-              <a:t>Return the signed data confidentiality form</a:t>
+              <a:t>Return the signed data confidentiality form on Thursday</a:t>
             </a:r>
             <a:endParaRPr b="1" dirty="0">
               <a:solidFill>
@@ -13542,7 +13612,7 @@
 </p:sld>
 </file>
 
-<file path=ppt/slides/slide14.xml><?xml version="1.0" encoding="utf-8"?>
+<file path=ppt/slides/slide15.xml><?xml version="1.0" encoding="utf-8"?>
 <p:sld xmlns:a="http://schemas.openxmlformats.org/drawingml/2006/main" xmlns:r="http://schemas.openxmlformats.org/officeDocument/2006/relationships" xmlns:p="http://schemas.openxmlformats.org/presentationml/2006/main">
   <p:cSld>
     <p:spTree>
@@ -13638,8 +13708,13 @@
             </a:pPr>
             <a:r>
               <a:rPr lang="en" dirty="0"/>
-              <a:t>Make sure to fill out project preference form by end of tomorrow</a:t>
+              <a:t>Make sure to fill out project preference form by class on </a:t>
             </a:r>
+            <a:r>
+              <a:rPr lang="en" dirty="0" err="1"/>
+              <a:t>thursday</a:t>
+            </a:r>
+            <a:endParaRPr lang="en" dirty="0"/>
           </a:p>
           <a:p>
             <a:pPr marL="457200" lvl="0" indent="-342900" algn="l" rtl="0">
@@ -13730,7 +13805,7 @@
 </p:sld>
 </file>
 
-<file path=ppt/slides/slide15.xml><?xml version="1.0" encoding="utf-8"?>
+<file path=ppt/slides/slide16.xml><?xml version="1.0" encoding="utf-8"?>
 <p:sld xmlns:a="http://schemas.openxmlformats.org/drawingml/2006/main" xmlns:r="http://schemas.openxmlformats.org/officeDocument/2006/relationships" xmlns:p="http://schemas.openxmlformats.org/presentationml/2006/main">
   <p:cSld>
     <p:spTree>
@@ -14072,7 +14147,15 @@
             </a:pPr>
             <a:r>
               <a:rPr lang="en" dirty="0"/>
-              <a:t>We’ll have a tech session tomorrow to help with setup</a:t>
+              <a:t>We’ll have a tech session </a:t>
+            </a:r>
+            <a:r>
+              <a:rPr lang="en" dirty="0" err="1"/>
+              <a:t>friday</a:t>
+            </a:r>
+            <a:r>
+              <a:rPr lang="en" dirty="0"/>
+              <a:t> to help with setup</a:t>
             </a:r>
             <a:endParaRPr dirty="0"/>
           </a:p>
@@ -14130,7 +14213,7 @@
 </p:sld>
 </file>
 
-<file path=ppt/slides/slide16.xml><?xml version="1.0" encoding="utf-8"?>
+<file path=ppt/slides/slide17.xml><?xml version="1.0" encoding="utf-8"?>
 <p:sld xmlns:a="http://schemas.openxmlformats.org/drawingml/2006/main" xmlns:r="http://schemas.openxmlformats.org/officeDocument/2006/relationships" xmlns:p="http://schemas.openxmlformats.org/presentationml/2006/main">
   <p:cSld>
     <p:spTree>
@@ -14240,18 +14323,18 @@
           <a:p>
             <a:pPr lvl="1"/>
             <a:r>
-              <a:rPr lang="en-US" dirty="0"/>
-              <a:t>Make sure to fill out the survey by tomorrow </a:t>
+              <a:rPr lang="en-US" sz="1600" dirty="0"/>
+              <a:t>Make sure to fill out the </a:t>
             </a:r>
             <a:r>
-              <a:rPr lang="en-US" sz="1000" dirty="0"/>
-              <a:t>- </a:t>
+              <a:rPr lang="en-US" sz="1600" dirty="0" err="1"/>
+              <a:t>github</a:t>
             </a:r>
             <a:r>
-              <a:rPr lang="en-US" sz="1200" dirty="0"/>
-              <a:t>We need this get you set up on the infrastructure</a:t>
+              <a:rPr lang="en-US" sz="1600" dirty="0"/>
+              <a:t> and ssh form by end of today - We need this get you set up on the infrastructure</a:t>
             </a:r>
-            <a:endParaRPr lang="en" dirty="0"/>
+            <a:endParaRPr lang="en" sz="1600" dirty="0"/>
           </a:p>
           <a:p>
             <a:pPr lvl="1">
@@ -14268,7 +14351,7 @@
             <a:pPr marL="139700" indent="0">
               <a:buNone/>
             </a:pPr>
-            <a:endParaRPr lang="en" sz="2000" dirty="0"/>
+            <a:endParaRPr lang="en" sz="1400" dirty="0"/>
           </a:p>
           <a:p>
             <a:pPr marL="457200" lvl="0" indent="-342900" algn="l" rtl="0">
@@ -14350,7 +14433,7 @@
             </a:pPr>
             <a:r>
               <a:rPr lang="en-US" sz="1600" dirty="0"/>
-              <a:t>Due Wednesday: Project Preferences</a:t>
+              <a:t>Due Thursday: Project Preferences</a:t>
             </a:r>
           </a:p>
           <a:p>
@@ -14441,7 +14524,7 @@
         </p:nvSpPr>
         <p:spPr>
           <a:xfrm>
-            <a:off x="311700" y="1152475"/>
+            <a:off x="22942" y="1162101"/>
             <a:ext cx="8520600" cy="3416400"/>
           </a:xfrm>
           <a:prstGeom prst="rect">
@@ -16682,7 +16765,7 @@
         </p:blipFill>
         <p:spPr bwMode="auto">
           <a:xfrm>
-            <a:off x="44823" y="723106"/>
+            <a:off x="44823" y="732731"/>
             <a:ext cx="9144000" cy="3697287"/>
           </a:xfrm>
           <a:prstGeom prst="rect">
@@ -16852,7 +16935,7 @@
   <p:cSld>
     <p:spTree>
       <p:nvGrpSpPr>
-        <p:cNvPr id="1" name="Shape 124"/>
+        <p:cNvPr id="1" name=""/>
         <p:cNvGrpSpPr/>
         <p:nvPr/>
       </p:nvGrpSpPr>
@@ -16866,49 +16949,35 @@
       </p:grpSpPr>
       <p:sp>
         <p:nvSpPr>
-          <p:cNvPr id="125" name="Google Shape;125;p21"/>
-          <p:cNvSpPr txBox="1">
+          <p:cNvPr id="2" name="Title 1">
+            <a:extLst>
+              <a:ext uri="{FF2B5EF4-FFF2-40B4-BE49-F238E27FC236}">
+                <a16:creationId xmlns:a16="http://schemas.microsoft.com/office/drawing/2014/main" id="{29D98440-B3C4-B779-B907-739231E946F9}"/>
+              </a:ext>
+            </a:extLst>
+          </p:cNvPr>
+          <p:cNvSpPr>
             <a:spLocks noGrp="1"/>
           </p:cNvSpPr>
           <p:nvPr>
             <p:ph type="title"/>
           </p:nvPr>
         </p:nvSpPr>
-        <p:spPr>
-          <a:xfrm>
-            <a:off x="311700" y="445025"/>
-            <a:ext cx="8520600" cy="572700"/>
-          </a:xfrm>
-          <a:prstGeom prst="rect">
-            <a:avLst/>
-          </a:prstGeom>
-        </p:spPr>
+        <p:spPr/>
         <p:txBody>
-          <a:bodyPr spcFirstLastPara="1" wrap="square" lIns="91425" tIns="91425" rIns="91425" bIns="91425" anchor="t" anchorCtr="0">
-            <a:noAutofit/>
-          </a:bodyPr>
+          <a:bodyPr/>
           <a:lstStyle/>
           <a:p>
-            <a:pPr marL="0" lvl="0" indent="0" algn="l" rtl="0">
-              <a:spcBef>
-                <a:spcPts val="0"/>
-              </a:spcBef>
-              <a:spcAft>
-                <a:spcPts val="0"/>
-              </a:spcAft>
-              <a:buNone/>
-            </a:pPr>
-            <a:r>
-              <a:rPr lang="en" dirty="0">
-                <a:hlinkClick r:id="rId3"/>
-              </a:rPr>
-              <a:t>Class Schedule</a:t>
-            </a:r>
-            <a:endParaRPr dirty="0"/>
+            <a:endParaRPr lang="en-US" dirty="0"/>
           </a:p>
         </p:txBody>
       </p:sp>
     </p:spTree>
+    <p:extLst>
+      <p:ext uri="{BB962C8B-B14F-4D97-AF65-F5344CB8AC3E}">
+        <p14:creationId xmlns:p14="http://schemas.microsoft.com/office/powerpoint/2010/main" val="3770703481"/>
+      </p:ext>
+    </p:extLst>
   </p:cSld>
   <p:clrMapOvr>
     <a:masterClrMapping/>

--- a/Lectures/01-ClassOverview.pptx
+++ b/Lectures/01-ClassOverview.pptx
@@ -5,7 +5,7 @@
     <p:sldMasterId id="2147483659" r:id="rId1"/>
   </p:sldMasterIdLst>
   <p:notesMasterIdLst>
-    <p:notesMasterId r:id="rId19"/>
+    <p:notesMasterId r:id="rId20"/>
   </p:notesMasterIdLst>
   <p:sldIdLst>
     <p:sldId id="256" r:id="rId2"/>
@@ -17,24 +17,25 @@
     <p:sldId id="298" r:id="rId8"/>
     <p:sldId id="295" r:id="rId9"/>
     <p:sldId id="299" r:id="rId10"/>
-    <p:sldId id="264" r:id="rId11"/>
-    <p:sldId id="266" r:id="rId12"/>
-    <p:sldId id="267" r:id="rId13"/>
-    <p:sldId id="270" r:id="rId14"/>
-    <p:sldId id="271" r:id="rId15"/>
-    <p:sldId id="269" r:id="rId16"/>
-    <p:sldId id="272" r:id="rId17"/>
-    <p:sldId id="273" r:id="rId18"/>
+    <p:sldId id="300" r:id="rId11"/>
+    <p:sldId id="264" r:id="rId12"/>
+    <p:sldId id="266" r:id="rId13"/>
+    <p:sldId id="267" r:id="rId14"/>
+    <p:sldId id="270" r:id="rId15"/>
+    <p:sldId id="271" r:id="rId16"/>
+    <p:sldId id="269" r:id="rId17"/>
+    <p:sldId id="272" r:id="rId18"/>
+    <p:sldId id="273" r:id="rId19"/>
   </p:sldIdLst>
   <p:sldSz cx="9144000" cy="5143500" type="screen16x9"/>
   <p:notesSz cx="6858000" cy="9144000"/>
   <p:embeddedFontLst>
     <p:embeddedFont>
       <p:font typeface="Lato" panose="020F0502020204030203" pitchFamily="34" charset="0"/>
-      <p:regular r:id="rId20"/>
-      <p:bold r:id="rId21"/>
-      <p:italic r:id="rId22"/>
-      <p:boldItalic r:id="rId23"/>
+      <p:regular r:id="rId21"/>
+      <p:bold r:id="rId22"/>
+      <p:italic r:id="rId23"/>
+      <p:boldItalic r:id="rId24"/>
     </p:embeddedFont>
   </p:embeddedFontLst>
   <p:defaultTextStyle>
@@ -12307,6 +12308,70 @@
   <p:cSld>
     <p:spTree>
       <p:nvGrpSpPr>
+        <p:cNvPr id="1" name="">
+          <a:extLst>
+            <a:ext uri="{FF2B5EF4-FFF2-40B4-BE49-F238E27FC236}">
+              <a16:creationId xmlns:a16="http://schemas.microsoft.com/office/drawing/2014/main" id="{9A02B76A-E90E-A15E-E061-7693A514D767}"/>
+            </a:ext>
+          </a:extLst>
+        </p:cNvPr>
+        <p:cNvGrpSpPr/>
+        <p:nvPr/>
+      </p:nvGrpSpPr>
+      <p:grpSpPr>
+        <a:xfrm>
+          <a:off x="0" y="0"/>
+          <a:ext cx="0" cy="0"/>
+          <a:chOff x="0" y="0"/>
+          <a:chExt cx="0" cy="0"/>
+        </a:xfrm>
+      </p:grpSpPr>
+      <p:sp>
+        <p:nvSpPr>
+          <p:cNvPr id="2" name="Title 1">
+            <a:extLst>
+              <a:ext uri="{FF2B5EF4-FFF2-40B4-BE49-F238E27FC236}">
+                <a16:creationId xmlns:a16="http://schemas.microsoft.com/office/drawing/2014/main" id="{13BBC62A-CCB7-0C44-D884-3648C97CEFD5}"/>
+              </a:ext>
+            </a:extLst>
+          </p:cNvPr>
+          <p:cNvSpPr>
+            <a:spLocks noGrp="1"/>
+          </p:cNvSpPr>
+          <p:nvPr>
+            <p:ph type="title"/>
+          </p:nvPr>
+        </p:nvSpPr>
+        <p:spPr/>
+        <p:txBody>
+          <a:bodyPr/>
+          <a:lstStyle/>
+          <a:p>
+            <a:r>
+              <a:rPr lang="en-US" dirty="0"/>
+              <a:t>What do you want to get out of this class?</a:t>
+            </a:r>
+          </a:p>
+        </p:txBody>
+      </p:sp>
+    </p:spTree>
+    <p:extLst>
+      <p:ext uri="{BB962C8B-B14F-4D97-AF65-F5344CB8AC3E}">
+        <p14:creationId xmlns:p14="http://schemas.microsoft.com/office/powerpoint/2010/main" val="1211240618"/>
+      </p:ext>
+    </p:extLst>
+  </p:cSld>
+  <p:clrMapOvr>
+    <a:masterClrMapping/>
+  </p:clrMapOvr>
+</p:sld>
+</file>
+
+<file path=ppt/slides/slide11.xml><?xml version="1.0" encoding="utf-8"?>
+<p:sld xmlns:a="http://schemas.openxmlformats.org/drawingml/2006/main" xmlns:r="http://schemas.openxmlformats.org/officeDocument/2006/relationships" xmlns:p="http://schemas.openxmlformats.org/presentationml/2006/main">
+  <p:cSld>
+    <p:spTree>
+      <p:nvGrpSpPr>
         <p:cNvPr id="1" name="Shape 124"/>
         <p:cNvGrpSpPr/>
         <p:nvPr/>
@@ -12371,7 +12436,7 @@
 </p:sld>
 </file>
 
-<file path=ppt/slides/slide11.xml><?xml version="1.0" encoding="utf-8"?>
+<file path=ppt/slides/slide12.xml><?xml version="1.0" encoding="utf-8"?>
 <p:sld xmlns:a="http://schemas.openxmlformats.org/drawingml/2006/main" xmlns:r="http://schemas.openxmlformats.org/officeDocument/2006/relationships" xmlns:p="http://schemas.openxmlformats.org/presentationml/2006/main">
   <p:cSld>
     <p:spTree>
@@ -12667,7 +12732,7 @@
 </p:sld>
 </file>
 
-<file path=ppt/slides/slide12.xml><?xml version="1.0" encoding="utf-8"?>
+<file path=ppt/slides/slide13.xml><?xml version="1.0" encoding="utf-8"?>
 <p:sld xmlns:a="http://schemas.openxmlformats.org/drawingml/2006/main" xmlns:r="http://schemas.openxmlformats.org/officeDocument/2006/relationships" xmlns:p="http://schemas.openxmlformats.org/presentationml/2006/main">
   <p:cSld>
     <p:spTree>
@@ -12990,7 +13055,7 @@
 </p:sld>
 </file>
 
-<file path=ppt/slides/slide13.xml><?xml version="1.0" encoding="utf-8"?>
+<file path=ppt/slides/slide14.xml><?xml version="1.0" encoding="utf-8"?>
 <p:sld xmlns:a="http://schemas.openxmlformats.org/drawingml/2006/main" xmlns:r="http://schemas.openxmlformats.org/officeDocument/2006/relationships" xmlns:p="http://schemas.openxmlformats.org/presentationml/2006/main">
   <p:cSld>
     <p:spTree>
@@ -13320,7 +13385,7 @@
 </p:sld>
 </file>
 
-<file path=ppt/slides/slide14.xml><?xml version="1.0" encoding="utf-8"?>
+<file path=ppt/slides/slide15.xml><?xml version="1.0" encoding="utf-8"?>
 <p:sld xmlns:a="http://schemas.openxmlformats.org/drawingml/2006/main" xmlns:r="http://schemas.openxmlformats.org/officeDocument/2006/relationships" xmlns:p="http://schemas.openxmlformats.org/presentationml/2006/main">
   <p:cSld>
     <p:spTree>
@@ -13612,7 +13677,7 @@
 </p:sld>
 </file>
 
-<file path=ppt/slides/slide15.xml><?xml version="1.0" encoding="utf-8"?>
+<file path=ppt/slides/slide16.xml><?xml version="1.0" encoding="utf-8"?>
 <p:sld xmlns:a="http://schemas.openxmlformats.org/drawingml/2006/main" xmlns:r="http://schemas.openxmlformats.org/officeDocument/2006/relationships" xmlns:p="http://schemas.openxmlformats.org/presentationml/2006/main">
   <p:cSld>
     <p:spTree>
@@ -13805,7 +13870,7 @@
 </p:sld>
 </file>
 
-<file path=ppt/slides/slide16.xml><?xml version="1.0" encoding="utf-8"?>
+<file path=ppt/slides/slide17.xml><?xml version="1.0" encoding="utf-8"?>
 <p:sld xmlns:a="http://schemas.openxmlformats.org/drawingml/2006/main" xmlns:r="http://schemas.openxmlformats.org/officeDocument/2006/relationships" xmlns:p="http://schemas.openxmlformats.org/presentationml/2006/main">
   <p:cSld>
     <p:spTree>
@@ -14213,7 +14278,7 @@
 </p:sld>
 </file>
 
-<file path=ppt/slides/slide17.xml><?xml version="1.0" encoding="utf-8"?>
+<file path=ppt/slides/slide18.xml><?xml version="1.0" encoding="utf-8"?>
 <p:sld xmlns:a="http://schemas.openxmlformats.org/drawingml/2006/main" xmlns:r="http://schemas.openxmlformats.org/officeDocument/2006/relationships" xmlns:p="http://schemas.openxmlformats.org/presentationml/2006/main">
   <p:cSld>
     <p:spTree>
@@ -16968,7 +17033,10 @@
           <a:bodyPr/>
           <a:lstStyle/>
           <a:p>
-            <a:endParaRPr lang="en-US" dirty="0"/>
+            <a:r>
+              <a:rPr lang="en-US" dirty="0"/>
+              <a:t>Your experiences</a:t>
+            </a:r>
           </a:p>
         </p:txBody>
       </p:sp>
